--- a/人形机器人端侧拟人模型选型对比-蓝橙.pptx
+++ b/人形机器人端侧拟人模型选型对比-蓝橙.pptx
@@ -3355,7 +3355,7 @@
                 <a:latin typeface="微软雅黑"/>
                 <a:ea typeface="微软雅黑"/>
               </a:rPr>
-              <a:t>竞品方案参考 + RDK S100 落地建议</a:t>
+              <a:t>拟人对话优先 · 竞品参考 + RDK S100 落地</a:t>
             </a:r>
           </a:p>
         </p:txBody>
@@ -12096,7 +12096,7 @@
                 <a:latin typeface="微软雅黑"/>
                 <a:ea typeface="微软雅黑"/>
               </a:rPr>
-              <a:t>CANDIDATES · 候选</a:t>
+              <a:t>CANDIDATES · 拟人维度</a:t>
             </a:r>
           </a:p>
         </p:txBody>
@@ -12139,7 +12139,7 @@
                 <a:latin typeface="微软雅黑"/>
                 <a:ea typeface="微软雅黑"/>
               </a:rPr>
-              <a:t>端侧候选小模型（含适配度）</a:t>
+              <a:t>端侧候选小模型（拟人能力 + 适配性）</a:t>
             </a:r>
           </a:p>
         </p:txBody>
@@ -12206,7 +12206,7 @@
         </p:nvGraphicFramePr>
         <p:xfrm>
           <a:off x="548640" y="1554480"/>
-          <a:ext cx="11091669" cy="4023360"/>
+          <a:ext cx="11091667" cy="4023360"/>
         </p:xfrm>
         <a:graphic>
           <a:graphicData uri="http://schemas.openxmlformats.org/drawingml/2006/table">
@@ -12215,14 +12215,14 @@
                 <a:tableStyleId>{2D5ABB26-0587-4C30-8999-92F81FD0307C}</a:tableStyleId>
               </a:tblPr>
               <a:tblGrid>
-                <a:gridCol w="1963127"/>
-                <a:gridCol w="981563"/>
-                <a:gridCol w="1276033"/>
-                <a:gridCol w="1079720"/>
-                <a:gridCol w="1079720"/>
-                <a:gridCol w="1079720"/>
-                <a:gridCol w="1079720"/>
-                <a:gridCol w="2552066"/>
+                <a:gridCol w="1881622"/>
+                <a:gridCol w="891295"/>
+                <a:gridCol w="1089360"/>
+                <a:gridCol w="1089360"/>
+                <a:gridCol w="1485491"/>
+                <a:gridCol w="990327"/>
+                <a:gridCol w="1188393"/>
+                <a:gridCol w="2475819"/>
               </a:tblGrid>
               <a:tr h="502920">
                 <a:tc>
@@ -12287,7 +12287,7 @@
                           <a:latin typeface="微软雅黑"/>
                           <a:ea typeface="微软雅黑"/>
                         </a:rPr>
-                        <a:t>INT4显存</a:t>
+                        <a:t>显存</a:t>
                       </a:r>
                     </a:p>
                   </a:txBody>
@@ -12335,7 +12335,7 @@
                           <a:latin typeface="微软雅黑"/>
                           <a:ea typeface="微软雅黑"/>
                         </a:rPr>
-                        <a:t>拟人</a:t>
+                        <a:t>人设一致</a:t>
                       </a:r>
                     </a:p>
                   </a:txBody>
@@ -12359,7 +12359,7 @@
                           <a:latin typeface="微软雅黑"/>
                           <a:ea typeface="微软雅黑"/>
                         </a:rPr>
-                        <a:t>指令</a:t>
+                        <a:t>共情</a:t>
                       </a:r>
                     </a:p>
                   </a:txBody>
@@ -12383,7 +12383,7 @@
                           <a:latin typeface="微软雅黑"/>
                           <a:ea typeface="微软雅黑"/>
                         </a:rPr>
-                        <a:t>工具</a:t>
+                        <a:t>多轮记忆</a:t>
                       </a:r>
                     </a:p>
                   </a:txBody>
@@ -12553,7 +12553,7 @@
                           <a:latin typeface="微软雅黑"/>
                           <a:ea typeface="微软雅黑"/>
                         </a:rPr>
-                        <a:t>★★★</a:t>
+                        <a:t>★★</a:t>
                       </a:r>
                     </a:p>
                   </a:txBody>
@@ -12601,7 +12601,7 @@
                           <a:latin typeface="微软雅黑"/>
                           <a:ea typeface="微软雅黑"/>
                         </a:rPr>
-                        <a:t>✓ 官方·兜底</a:t>
+                        <a:t>✓ 官方·仅兜底</a:t>
                       </a:r>
                     </a:p>
                   </a:txBody>
@@ -12723,6 +12723,30 @@
                           <a:latin typeface="微软雅黑"/>
                           <a:ea typeface="微软雅黑"/>
                         </a:rPr>
+                        <a:t>★★★(可LoRA)</a:t>
+                      </a:r>
+                    </a:p>
+                  </a:txBody>
+                  <a:tcPr marL="45720" marR="45720" marT="9144" marB="9144" anchor="ctr">
+                    <a:solidFill>
+                      <a:srgbClr val="173A57"/>
+                    </a:solidFill>
+                  </a:tcPr>
+                </a:tc>
+                <a:tc>
+                  <a:txBody>
+                    <a:bodyPr/>
+                    <a:lstStyle/>
+                    <a:p>
+                      <a:pPr algn="ctr"/>
+                      <a:r>
+                        <a:rPr sz="1050" b="1">
+                          <a:solidFill>
+                            <a:srgbClr val="F97316"/>
+                          </a:solidFill>
+                          <a:latin typeface="微软雅黑"/>
+                          <a:ea typeface="微软雅黑"/>
+                        </a:rPr>
                         <a:t>★★★</a:t>
                       </a:r>
                     </a:p>
@@ -12747,31 +12771,7 @@
                           <a:latin typeface="微软雅黑"/>
                           <a:ea typeface="微软雅黑"/>
                         </a:rPr>
-                        <a:t>★★★★</a:t>
-                      </a:r>
-                    </a:p>
-                  </a:txBody>
-                  <a:tcPr marL="45720" marR="45720" marT="9144" marB="9144" anchor="ctr">
-                    <a:solidFill>
-                      <a:srgbClr val="173A57"/>
-                    </a:solidFill>
-                  </a:tcPr>
-                </a:tc>
-                <a:tc>
-                  <a:txBody>
-                    <a:bodyPr/>
-                    <a:lstStyle/>
-                    <a:p>
-                      <a:pPr algn="ctr"/>
-                      <a:r>
-                        <a:rPr sz="1050" b="1">
-                          <a:solidFill>
-                            <a:srgbClr val="F97316"/>
-                          </a:solidFill>
-                          <a:latin typeface="微软雅黑"/>
-                          <a:ea typeface="微软雅黑"/>
-                        </a:rPr>
-                        <a:t>★★★★</a:t>
+                        <a:t>★★★</a:t>
                       </a:r>
                     </a:p>
                   </a:txBody>
@@ -12965,7 +12965,7 @@
                           <a:latin typeface="微软雅黑"/>
                           <a:ea typeface="微软雅黑"/>
                         </a:rPr>
-                        <a:t>★★★★</a:t>
+                        <a:t>★★★</a:t>
                       </a:r>
                     </a:p>
                   </a:txBody>
@@ -13008,6 +13008,200 @@
                     <a:p>
                       <a:pPr algn="ctr"/>
                       <a:r>
+                        <a:rPr sz="1050" b="0">
+                          <a:solidFill>
+                            <a:srgbClr val="C6D3E2"/>
+                          </a:solidFill>
+                          <a:latin typeface="微软雅黑"/>
+                          <a:ea typeface="微软雅黑"/>
+                        </a:rPr>
+                        <a:t>Qwen3-4B</a:t>
+                      </a:r>
+                    </a:p>
+                  </a:txBody>
+                  <a:tcPr marL="45720" marR="45720" marT="9144" marB="9144" anchor="ctr">
+                    <a:solidFill>
+                      <a:srgbClr val="1B3450"/>
+                    </a:solidFill>
+                  </a:tcPr>
+                </a:tc>
+                <a:tc>
+                  <a:txBody>
+                    <a:bodyPr/>
+                    <a:lstStyle/>
+                    <a:p>
+                      <a:pPr algn="ctr"/>
+                      <a:r>
+                        <a:rPr sz="1050" b="0">
+                          <a:solidFill>
+                            <a:srgbClr val="C6D3E2"/>
+                          </a:solidFill>
+                          <a:latin typeface="微软雅黑"/>
+                          <a:ea typeface="微软雅黑"/>
+                        </a:rPr>
+                        <a:t>4B</a:t>
+                      </a:r>
+                    </a:p>
+                  </a:txBody>
+                  <a:tcPr marL="45720" marR="45720" marT="9144" marB="9144" anchor="ctr">
+                    <a:solidFill>
+                      <a:srgbClr val="1B3450"/>
+                    </a:solidFill>
+                  </a:tcPr>
+                </a:tc>
+                <a:tc>
+                  <a:txBody>
+                    <a:bodyPr/>
+                    <a:lstStyle/>
+                    <a:p>
+                      <a:pPr algn="ctr"/>
+                      <a:r>
+                        <a:rPr sz="1050" b="0">
+                          <a:solidFill>
+                            <a:srgbClr val="C6D3E2"/>
+                          </a:solidFill>
+                          <a:latin typeface="微软雅黑"/>
+                          <a:ea typeface="微软雅黑"/>
+                        </a:rPr>
+                        <a:t>~2.7GB</a:t>
+                      </a:r>
+                    </a:p>
+                  </a:txBody>
+                  <a:tcPr marL="45720" marR="45720" marT="9144" marB="9144" anchor="ctr">
+                    <a:solidFill>
+                      <a:srgbClr val="1B3450"/>
+                    </a:solidFill>
+                  </a:tcPr>
+                </a:tc>
+                <a:tc>
+                  <a:txBody>
+                    <a:bodyPr/>
+                    <a:lstStyle/>
+                    <a:p>
+                      <a:pPr algn="ctr"/>
+                      <a:r>
+                        <a:rPr sz="1050" b="0">
+                          <a:solidFill>
+                            <a:srgbClr val="C6D3E2"/>
+                          </a:solidFill>
+                          <a:latin typeface="微软雅黑"/>
+                          <a:ea typeface="微软雅黑"/>
+                        </a:rPr>
+                        <a:t>★★★★★</a:t>
+                      </a:r>
+                    </a:p>
+                  </a:txBody>
+                  <a:tcPr marL="45720" marR="45720" marT="9144" marB="9144" anchor="ctr">
+                    <a:solidFill>
+                      <a:srgbClr val="1B3450"/>
+                    </a:solidFill>
+                  </a:tcPr>
+                </a:tc>
+                <a:tc>
+                  <a:txBody>
+                    <a:bodyPr/>
+                    <a:lstStyle/>
+                    <a:p>
+                      <a:pPr algn="ctr"/>
+                      <a:r>
+                        <a:rPr sz="1050" b="0">
+                          <a:solidFill>
+                            <a:srgbClr val="C6D3E2"/>
+                          </a:solidFill>
+                          <a:latin typeface="微软雅黑"/>
+                          <a:ea typeface="微软雅黑"/>
+                        </a:rPr>
+                        <a:t>★★★★</a:t>
+                      </a:r>
+                    </a:p>
+                  </a:txBody>
+                  <a:tcPr marL="45720" marR="45720" marT="9144" marB="9144" anchor="ctr">
+                    <a:solidFill>
+                      <a:srgbClr val="1B3450"/>
+                    </a:solidFill>
+                  </a:tcPr>
+                </a:tc>
+                <a:tc>
+                  <a:txBody>
+                    <a:bodyPr/>
+                    <a:lstStyle/>
+                    <a:p>
+                      <a:pPr algn="ctr"/>
+                      <a:r>
+                        <a:rPr sz="1050" b="0">
+                          <a:solidFill>
+                            <a:srgbClr val="C6D3E2"/>
+                          </a:solidFill>
+                          <a:latin typeface="微软雅黑"/>
+                          <a:ea typeface="微软雅黑"/>
+                        </a:rPr>
+                        <a:t>★★★★</a:t>
+                      </a:r>
+                    </a:p>
+                  </a:txBody>
+                  <a:tcPr marL="45720" marR="45720" marT="9144" marB="9144" anchor="ctr">
+                    <a:solidFill>
+                      <a:srgbClr val="1B3450"/>
+                    </a:solidFill>
+                  </a:tcPr>
+                </a:tc>
+                <a:tc>
+                  <a:txBody>
+                    <a:bodyPr/>
+                    <a:lstStyle/>
+                    <a:p>
+                      <a:pPr algn="ctr"/>
+                      <a:r>
+                        <a:rPr sz="1050" b="0">
+                          <a:solidFill>
+                            <a:srgbClr val="C6D3E2"/>
+                          </a:solidFill>
+                          <a:latin typeface="微软雅黑"/>
+                          <a:ea typeface="微软雅黑"/>
+                        </a:rPr>
+                        <a:t>★★★★</a:t>
+                      </a:r>
+                    </a:p>
+                  </a:txBody>
+                  <a:tcPr marL="45720" marR="45720" marT="9144" marB="9144" anchor="ctr">
+                    <a:solidFill>
+                      <a:srgbClr val="1B3450"/>
+                    </a:solidFill>
+                  </a:tcPr>
+                </a:tc>
+                <a:tc>
+                  <a:txBody>
+                    <a:bodyPr/>
+                    <a:lstStyle/>
+                    <a:p>
+                      <a:pPr algn="ctr"/>
+                      <a:r>
+                        <a:rPr sz="1050" b="0">
+                          <a:solidFill>
+                            <a:srgbClr val="C6D3E2"/>
+                          </a:solidFill>
+                          <a:latin typeface="微软雅黑"/>
+                          <a:ea typeface="微软雅黑"/>
+                        </a:rPr>
+                        <a:t>✓ 官方·提质</a:t>
+                      </a:r>
+                    </a:p>
+                  </a:txBody>
+                  <a:tcPr marL="45720" marR="45720" marT="9144" marB="9144" anchor="ctr">
+                    <a:solidFill>
+                      <a:srgbClr val="1B3450"/>
+                    </a:solidFill>
+                  </a:tcPr>
+                </a:tc>
+              </a:tr>
+              <a:tr h="502920">
+                <a:tc>
+                  <a:txBody>
+                    <a:bodyPr/>
+                    <a:lstStyle/>
+                    <a:p>
+                      <a:pPr algn="ctr"/>
+                      <a:r>
                         <a:rPr sz="1050" b="1">
                           <a:solidFill>
                             <a:srgbClr val="F97316"/>
@@ -13015,7 +13209,7 @@
                           <a:latin typeface="微软雅黑"/>
                           <a:ea typeface="微软雅黑"/>
                         </a:rPr>
-                        <a:t>Qwen3-4B</a:t>
+                        <a:t>Index-1.9B</a:t>
                       </a:r>
                     </a:p>
                   </a:txBody>
@@ -13039,7 +13233,7 @@
                           <a:latin typeface="微软雅黑"/>
                           <a:ea typeface="微软雅黑"/>
                         </a:rPr>
-                        <a:t>4B</a:t>
+                        <a:t>1.9B</a:t>
                       </a:r>
                     </a:p>
                   </a:txBody>
@@ -13063,7 +13257,31 @@
                           <a:latin typeface="微软雅黑"/>
                           <a:ea typeface="微软雅黑"/>
                         </a:rPr>
-                        <a:t>~2.7GB</a:t>
+                        <a:t>~1.3GB</a:t>
+                      </a:r>
+                    </a:p>
+                  </a:txBody>
+                  <a:tcPr marL="45720" marR="45720" marT="9144" marB="9144" anchor="ctr">
+                    <a:solidFill>
+                      <a:srgbClr val="173A57"/>
+                    </a:solidFill>
+                  </a:tcPr>
+                </a:tc>
+                <a:tc>
+                  <a:txBody>
+                    <a:bodyPr/>
+                    <a:lstStyle/>
+                    <a:p>
+                      <a:pPr algn="ctr"/>
+                      <a:r>
+                        <a:rPr sz="1050" b="1">
+                          <a:solidFill>
+                            <a:srgbClr val="F97316"/>
+                          </a:solidFill>
+                          <a:latin typeface="微软雅黑"/>
+                          <a:ea typeface="微软雅黑"/>
+                        </a:rPr>
+                        <a:t>★★★★</a:t>
                       </a:r>
                     </a:p>
                   </a:txBody>
@@ -13135,7 +13353,7 @@
                           <a:latin typeface="微软雅黑"/>
                           <a:ea typeface="微软雅黑"/>
                         </a:rPr>
-                        <a:t>★★★★★</a:t>
+                        <a:t>★★★</a:t>
                       </a:r>
                     </a:p>
                   </a:txBody>
@@ -13159,231 +13377,13 @@
                           <a:latin typeface="微软雅黑"/>
                           <a:ea typeface="微软雅黑"/>
                         </a:rPr>
-                        <a:t>★★★★★</a:t>
+                        <a:t>△ 需适配·拟人最强</a:t>
                       </a:r>
                     </a:p>
                   </a:txBody>
                   <a:tcPr marL="45720" marR="45720" marT="9144" marB="9144" anchor="ctr">
                     <a:solidFill>
                       <a:srgbClr val="173A57"/>
-                    </a:solidFill>
-                  </a:tcPr>
-                </a:tc>
-                <a:tc>
-                  <a:txBody>
-                    <a:bodyPr/>
-                    <a:lstStyle/>
-                    <a:p>
-                      <a:pPr algn="ctr"/>
-                      <a:r>
-                        <a:rPr sz="1050" b="1">
-                          <a:solidFill>
-                            <a:srgbClr val="F97316"/>
-                          </a:solidFill>
-                          <a:latin typeface="微软雅黑"/>
-                          <a:ea typeface="微软雅黑"/>
-                        </a:rPr>
-                        <a:t>✓ 官方·提质</a:t>
-                      </a:r>
-                    </a:p>
-                  </a:txBody>
-                  <a:tcPr marL="45720" marR="45720" marT="9144" marB="9144" anchor="ctr">
-                    <a:solidFill>
-                      <a:srgbClr val="173A57"/>
-                    </a:solidFill>
-                  </a:tcPr>
-                </a:tc>
-              </a:tr>
-              <a:tr h="502920">
-                <a:tc>
-                  <a:txBody>
-                    <a:bodyPr/>
-                    <a:lstStyle/>
-                    <a:p>
-                      <a:pPr algn="ctr"/>
-                      <a:r>
-                        <a:rPr sz="1050" b="0">
-                          <a:solidFill>
-                            <a:srgbClr val="C6D3E2"/>
-                          </a:solidFill>
-                          <a:latin typeface="微软雅黑"/>
-                          <a:ea typeface="微软雅黑"/>
-                        </a:rPr>
-                        <a:t>Index-1.9B</a:t>
-                      </a:r>
-                    </a:p>
-                  </a:txBody>
-                  <a:tcPr marL="45720" marR="45720" marT="9144" marB="9144" anchor="ctr">
-                    <a:solidFill>
-                      <a:srgbClr val="16283E"/>
-                    </a:solidFill>
-                  </a:tcPr>
-                </a:tc>
-                <a:tc>
-                  <a:txBody>
-                    <a:bodyPr/>
-                    <a:lstStyle/>
-                    <a:p>
-                      <a:pPr algn="ctr"/>
-                      <a:r>
-                        <a:rPr sz="1050" b="0">
-                          <a:solidFill>
-                            <a:srgbClr val="C6D3E2"/>
-                          </a:solidFill>
-                          <a:latin typeface="微软雅黑"/>
-                          <a:ea typeface="微软雅黑"/>
-                        </a:rPr>
-                        <a:t>1.9B</a:t>
-                      </a:r>
-                    </a:p>
-                  </a:txBody>
-                  <a:tcPr marL="45720" marR="45720" marT="9144" marB="9144" anchor="ctr">
-                    <a:solidFill>
-                      <a:srgbClr val="16283E"/>
-                    </a:solidFill>
-                  </a:tcPr>
-                </a:tc>
-                <a:tc>
-                  <a:txBody>
-                    <a:bodyPr/>
-                    <a:lstStyle/>
-                    <a:p>
-                      <a:pPr algn="ctr"/>
-                      <a:r>
-                        <a:rPr sz="1050" b="0">
-                          <a:solidFill>
-                            <a:srgbClr val="C6D3E2"/>
-                          </a:solidFill>
-                          <a:latin typeface="微软雅黑"/>
-                          <a:ea typeface="微软雅黑"/>
-                        </a:rPr>
-                        <a:t>~1.3GB</a:t>
-                      </a:r>
-                    </a:p>
-                  </a:txBody>
-                  <a:tcPr marL="45720" marR="45720" marT="9144" marB="9144" anchor="ctr">
-                    <a:solidFill>
-                      <a:srgbClr val="16283E"/>
-                    </a:solidFill>
-                  </a:tcPr>
-                </a:tc>
-                <a:tc>
-                  <a:txBody>
-                    <a:bodyPr/>
-                    <a:lstStyle/>
-                    <a:p>
-                      <a:pPr algn="ctr"/>
-                      <a:r>
-                        <a:rPr sz="1050" b="0">
-                          <a:solidFill>
-                            <a:srgbClr val="C6D3E2"/>
-                          </a:solidFill>
-                          <a:latin typeface="微软雅黑"/>
-                          <a:ea typeface="微软雅黑"/>
-                        </a:rPr>
-                        <a:t>★★★★</a:t>
-                      </a:r>
-                    </a:p>
-                  </a:txBody>
-                  <a:tcPr marL="45720" marR="45720" marT="9144" marB="9144" anchor="ctr">
-                    <a:solidFill>
-                      <a:srgbClr val="16283E"/>
-                    </a:solidFill>
-                  </a:tcPr>
-                </a:tc>
-                <a:tc>
-                  <a:txBody>
-                    <a:bodyPr/>
-                    <a:lstStyle/>
-                    <a:p>
-                      <a:pPr algn="ctr"/>
-                      <a:r>
-                        <a:rPr sz="1050" b="0">
-                          <a:solidFill>
-                            <a:srgbClr val="C6D3E2"/>
-                          </a:solidFill>
-                          <a:latin typeface="微软雅黑"/>
-                          <a:ea typeface="微软雅黑"/>
-                        </a:rPr>
-                        <a:t>★★★★★</a:t>
-                      </a:r>
-                    </a:p>
-                  </a:txBody>
-                  <a:tcPr marL="45720" marR="45720" marT="9144" marB="9144" anchor="ctr">
-                    <a:solidFill>
-                      <a:srgbClr val="16283E"/>
-                    </a:solidFill>
-                  </a:tcPr>
-                </a:tc>
-                <a:tc>
-                  <a:txBody>
-                    <a:bodyPr/>
-                    <a:lstStyle/>
-                    <a:p>
-                      <a:pPr algn="ctr"/>
-                      <a:r>
-                        <a:rPr sz="1050" b="0">
-                          <a:solidFill>
-                            <a:srgbClr val="C6D3E2"/>
-                          </a:solidFill>
-                          <a:latin typeface="微软雅黑"/>
-                          <a:ea typeface="微软雅黑"/>
-                        </a:rPr>
-                        <a:t>★★★</a:t>
-                      </a:r>
-                    </a:p>
-                  </a:txBody>
-                  <a:tcPr marL="45720" marR="45720" marT="9144" marB="9144" anchor="ctr">
-                    <a:solidFill>
-                      <a:srgbClr val="16283E"/>
-                    </a:solidFill>
-                  </a:tcPr>
-                </a:tc>
-                <a:tc>
-                  <a:txBody>
-                    <a:bodyPr/>
-                    <a:lstStyle/>
-                    <a:p>
-                      <a:pPr algn="ctr"/>
-                      <a:r>
-                        <a:rPr sz="1050" b="0">
-                          <a:solidFill>
-                            <a:srgbClr val="C6D3E2"/>
-                          </a:solidFill>
-                          <a:latin typeface="微软雅黑"/>
-                          <a:ea typeface="微软雅黑"/>
-                        </a:rPr>
-                        <a:t>★★</a:t>
-                      </a:r>
-                    </a:p>
-                  </a:txBody>
-                  <a:tcPr marL="45720" marR="45720" marT="9144" marB="9144" anchor="ctr">
-                    <a:solidFill>
-                      <a:srgbClr val="16283E"/>
-                    </a:solidFill>
-                  </a:tcPr>
-                </a:tc>
-                <a:tc>
-                  <a:txBody>
-                    <a:bodyPr/>
-                    <a:lstStyle/>
-                    <a:p>
-                      <a:pPr algn="ctr"/>
-                      <a:r>
-                        <a:rPr sz="1050" b="0">
-                          <a:solidFill>
-                            <a:srgbClr val="C6D3E2"/>
-                          </a:solidFill>
-                          <a:latin typeface="微软雅黑"/>
-                          <a:ea typeface="微软雅黑"/>
-                        </a:rPr>
-                        <a:t>△ 需适配·拟人强</a:t>
-                      </a:r>
-                    </a:p>
-                  </a:txBody>
-                  <a:tcPr marL="45720" marR="45720" marT="9144" marB="9144" anchor="ctr">
-                    <a:solidFill>
-                      <a:srgbClr val="16283E"/>
                     </a:solidFill>
                   </a:tcPr>
                 </a:tc>
@@ -13547,7 +13547,7 @@
                           <a:latin typeface="微软雅黑"/>
                           <a:ea typeface="微软雅黑"/>
                         </a:rPr>
-                        <a:t>★★★★</a:t>
+                        <a:t>★★★</a:t>
                       </a:r>
                     </a:p>
                   </a:txBody>
@@ -13717,7 +13717,7 @@
                           <a:latin typeface="微软雅黑"/>
                           <a:ea typeface="微软雅黑"/>
                         </a:rPr>
-                        <a:t>★★★★★</a:t>
+                        <a:t>★★★★</a:t>
                       </a:r>
                     </a:p>
                   </a:txBody>
@@ -13741,7 +13741,7 @@
                           <a:latin typeface="微软雅黑"/>
                           <a:ea typeface="微软雅黑"/>
                         </a:rPr>
-                        <a:t>★★★★★</a:t>
+                        <a:t>★★★★</a:t>
                       </a:r>
                     </a:p>
                   </a:txBody>
@@ -13818,7 +13818,7 @@
                 <a:latin typeface="微软雅黑"/>
                 <a:ea typeface="微软雅黑"/>
               </a:rPr>
-              <a:t>「拟人」=人格/口吻一致度；适配：✓ 官方ModelZoo已有 / △ 需自行工具链转换。算力有限优先 ✓ 项。</a:t>
+              <a:t>拟人维度=人设一致/共情/多轮记忆；适配：✓ 官方ModelZoo已有(直接可跑) / △ 需自行工具链转换(有成本与风险)。</a:t>
             </a:r>
           </a:p>
         </p:txBody>
@@ -14017,7 +14017,7 @@
                 <a:latin typeface="微软雅黑"/>
                 <a:ea typeface="微软雅黑"/>
               </a:rPr>
-              <a:t>SCORING · 加权评分</a:t>
+              <a:t>SCORING · 拟人优先+适配性</a:t>
             </a:r>
           </a:p>
         </p:txBody>
@@ -14127,7 +14127,7 @@
         </p:nvGraphicFramePr>
         <p:xfrm>
           <a:off x="548640" y="1554480"/>
-          <a:ext cx="11091668" cy="3840480"/>
+          <a:ext cx="12478129" cy="4242816"/>
         </p:xfrm>
         <a:graphic>
           <a:graphicData uri="http://schemas.openxmlformats.org/drawingml/2006/table">
@@ -14136,16 +14136,16 @@
                 <a:tableStyleId>{2D5ABB26-0587-4C30-8999-92F81FD0307C}</a:tableStyleId>
               </a:tblPr>
               <a:tblGrid>
-                <a:gridCol w="1864971"/>
-                <a:gridCol w="1079720"/>
-                <a:gridCol w="1079720"/>
-                <a:gridCol w="1079720"/>
-                <a:gridCol w="1079720"/>
-                <a:gridCol w="981563"/>
-                <a:gridCol w="1177876"/>
-                <a:gridCol w="2748378"/>
+                <a:gridCol w="2107417"/>
+                <a:gridCol w="1109167"/>
+                <a:gridCol w="1109167"/>
+                <a:gridCol w="1109167"/>
+                <a:gridCol w="1109167"/>
+                <a:gridCol w="1109167"/>
+                <a:gridCol w="3438418"/>
+                <a:gridCol w="1386459"/>
               </a:tblGrid>
-              <a:tr h="548640">
+              <a:tr h="530352">
                 <a:tc>
                   <a:txBody>
                     <a:bodyPr/>
@@ -14184,7 +14184,7 @@
                           <a:latin typeface="微软雅黑"/>
                           <a:ea typeface="微软雅黑"/>
                         </a:rPr>
-                        <a:t>速度30%</a:t>
+                        <a:t>拟人30%</a:t>
                       </a:r>
                     </a:p>
                   </a:txBody>
@@ -14208,7 +14208,7 @@
                           <a:latin typeface="微软雅黑"/>
                           <a:ea typeface="微软雅黑"/>
                         </a:rPr>
-                        <a:t>拟人25%</a:t>
+                        <a:t>适配25%</a:t>
                       </a:r>
                     </a:p>
                   </a:txBody>
@@ -14232,7 +14232,7 @@
                           <a:latin typeface="微软雅黑"/>
                           <a:ea typeface="微软雅黑"/>
                         </a:rPr>
-                        <a:t>准确20%</a:t>
+                        <a:t>速度20%</a:t>
                       </a:r>
                     </a:p>
                   </a:txBody>
@@ -14256,7 +14256,7 @@
                           <a:latin typeface="微软雅黑"/>
                           <a:ea typeface="微软雅黑"/>
                         </a:rPr>
-                        <a:t>资源15%</a:t>
+                        <a:t>中文15%</a:t>
                       </a:r>
                     </a:p>
                   </a:txBody>
@@ -14280,7 +14280,7 @@
                           <a:latin typeface="微软雅黑"/>
                           <a:ea typeface="微软雅黑"/>
                         </a:rPr>
-                        <a:t>中文10%</a:t>
+                        <a:t>资源10%</a:t>
                       </a:r>
                     </a:p>
                   </a:txBody>
@@ -14339,7 +14339,7 @@
                   </a:tcPr>
                 </a:tc>
               </a:tr>
-              <a:tr h="548640">
+              <a:tr h="530352">
                 <a:tc>
                   <a:txBody>
                     <a:bodyPr/>
@@ -14355,30 +14355,6 @@
                           <a:ea typeface="微软雅黑"/>
                         </a:rPr>
                         <a:t>Qwen3-1.7B</a:t>
-                      </a:r>
-                    </a:p>
-                  </a:txBody>
-                  <a:tcPr marL="45720" marR="45720" marT="9144" marB="9144" anchor="ctr">
-                    <a:solidFill>
-                      <a:srgbClr val="173A57"/>
-                    </a:solidFill>
-                  </a:tcPr>
-                </a:tc>
-                <a:tc>
-                  <a:txBody>
-                    <a:bodyPr/>
-                    <a:lstStyle/>
-                    <a:p>
-                      <a:pPr algn="ctr"/>
-                      <a:r>
-                        <a:rPr sz="1050" b="1">
-                          <a:solidFill>
-                            <a:srgbClr val="F97316"/>
-                          </a:solidFill>
-                          <a:latin typeface="微软雅黑"/>
-                          <a:ea typeface="微软雅黑"/>
-                        </a:rPr>
-                        <a:t>8.5</a:t>
                       </a:r>
                     </a:p>
                   </a:txBody>
@@ -14426,7 +14402,7 @@
                           <a:latin typeface="微软雅黑"/>
                           <a:ea typeface="微软雅黑"/>
                         </a:rPr>
-                        <a:t>7.5</a:t>
+                        <a:t>10.0</a:t>
                       </a:r>
                     </a:p>
                   </a:txBody>
@@ -14498,152 +14474,6 @@
                           <a:latin typeface="微软雅黑"/>
                           <a:ea typeface="微软雅黑"/>
                         </a:rPr>
-                        <a:t>7.93</a:t>
-                      </a:r>
-                    </a:p>
-                  </a:txBody>
-                  <a:tcPr marL="45720" marR="45720" marT="9144" marB="9144" anchor="ctr">
-                    <a:solidFill>
-                      <a:srgbClr val="173A57"/>
-                    </a:solidFill>
-                  </a:tcPr>
-                </a:tc>
-                <a:tc>
-                  <a:txBody>
-                    <a:bodyPr/>
-                    <a:lstStyle/>
-                    <a:p>
-                      <a:pPr algn="ctr"/>
-                      <a:r>
-                        <a:rPr sz="1050" b="1">
-                          <a:solidFill>
-                            <a:srgbClr val="F97316"/>
-                          </a:solidFill>
-                          <a:latin typeface="微软雅黑"/>
-                          <a:ea typeface="微软雅黑"/>
-                        </a:rPr>
-                        <a:t>🥇 纯端侧首选(官方)</a:t>
-                      </a:r>
-                    </a:p>
-                  </a:txBody>
-                  <a:tcPr marL="45720" marR="45720" marT="9144" marB="9144" anchor="ctr">
-                    <a:solidFill>
-                      <a:srgbClr val="173A57"/>
-                    </a:solidFill>
-                  </a:tcPr>
-                </a:tc>
-              </a:tr>
-              <a:tr h="548640">
-                <a:tc>
-                  <a:txBody>
-                    <a:bodyPr/>
-                    <a:lstStyle/>
-                    <a:p>
-                      <a:pPr algn="ctr"/>
-                      <a:r>
-                        <a:rPr sz="1050" b="1">
-                          <a:solidFill>
-                            <a:srgbClr val="F97316"/>
-                          </a:solidFill>
-                          <a:latin typeface="微软雅黑"/>
-                          <a:ea typeface="微软雅黑"/>
-                        </a:rPr>
-                        <a:t>Index-1.9B</a:t>
-                      </a:r>
-                    </a:p>
-                  </a:txBody>
-                  <a:tcPr marL="45720" marR="45720" marT="9144" marB="9144" anchor="ctr">
-                    <a:solidFill>
-                      <a:srgbClr val="173A57"/>
-                    </a:solidFill>
-                  </a:tcPr>
-                </a:tc>
-                <a:tc>
-                  <a:txBody>
-                    <a:bodyPr/>
-                    <a:lstStyle/>
-                    <a:p>
-                      <a:pPr algn="ctr"/>
-                      <a:r>
-                        <a:rPr sz="1050" b="1">
-                          <a:solidFill>
-                            <a:srgbClr val="F97316"/>
-                          </a:solidFill>
-                          <a:latin typeface="微软雅黑"/>
-                          <a:ea typeface="微软雅黑"/>
-                        </a:rPr>
-                        <a:t>8.0</a:t>
-                      </a:r>
-                    </a:p>
-                  </a:txBody>
-                  <a:tcPr marL="45720" marR="45720" marT="9144" marB="9144" anchor="ctr">
-                    <a:solidFill>
-                      <a:srgbClr val="173A57"/>
-                    </a:solidFill>
-                  </a:tcPr>
-                </a:tc>
-                <a:tc>
-                  <a:txBody>
-                    <a:bodyPr/>
-                    <a:lstStyle/>
-                    <a:p>
-                      <a:pPr algn="ctr"/>
-                      <a:r>
-                        <a:rPr sz="1050" b="1">
-                          <a:solidFill>
-                            <a:srgbClr val="F97316"/>
-                          </a:solidFill>
-                          <a:latin typeface="微软雅黑"/>
-                          <a:ea typeface="微软雅黑"/>
-                        </a:rPr>
-                        <a:t>9.0</a:t>
-                      </a:r>
-                    </a:p>
-                  </a:txBody>
-                  <a:tcPr marL="45720" marR="45720" marT="9144" marB="9144" anchor="ctr">
-                    <a:solidFill>
-                      <a:srgbClr val="173A57"/>
-                    </a:solidFill>
-                  </a:tcPr>
-                </a:tc>
-                <a:tc>
-                  <a:txBody>
-                    <a:bodyPr/>
-                    <a:lstStyle/>
-                    <a:p>
-                      <a:pPr algn="ctr"/>
-                      <a:r>
-                        <a:rPr sz="1050" b="1">
-                          <a:solidFill>
-                            <a:srgbClr val="F97316"/>
-                          </a:solidFill>
-                          <a:latin typeface="微软雅黑"/>
-                          <a:ea typeface="微软雅黑"/>
-                        </a:rPr>
-                        <a:t>6.5</a:t>
-                      </a:r>
-                    </a:p>
-                  </a:txBody>
-                  <a:tcPr marL="45720" marR="45720" marT="9144" marB="9144" anchor="ctr">
-                    <a:solidFill>
-                      <a:srgbClr val="173A57"/>
-                    </a:solidFill>
-                  </a:tcPr>
-                </a:tc>
-                <a:tc>
-                  <a:txBody>
-                    <a:bodyPr/>
-                    <a:lstStyle/>
-                    <a:p>
-                      <a:pPr algn="ctr"/>
-                      <a:r>
-                        <a:rPr sz="1050" b="1">
-                          <a:solidFill>
-                            <a:srgbClr val="F97316"/>
-                          </a:solidFill>
-                          <a:latin typeface="微软雅黑"/>
-                          <a:ea typeface="微软雅黑"/>
-                        </a:rPr>
                         <a:t>8.5</a:t>
                       </a:r>
                     </a:p>
@@ -14668,7 +14498,7 @@
                           <a:latin typeface="微软雅黑"/>
                           <a:ea typeface="微软雅黑"/>
                         </a:rPr>
-                        <a:t>8.0</a:t>
+                        <a:t>8.50</a:t>
                       </a:r>
                     </a:p>
                   </a:txBody>
@@ -14692,31 +14522,7 @@
                           <a:latin typeface="微软雅黑"/>
                           <a:ea typeface="微软雅黑"/>
                         </a:rPr>
-                        <a:t>7.93</a:t>
-                      </a:r>
-                    </a:p>
-                  </a:txBody>
-                  <a:tcPr marL="45720" marR="45720" marT="9144" marB="9144" anchor="ctr">
-                    <a:solidFill>
-                      <a:srgbClr val="173A57"/>
-                    </a:solidFill>
-                  </a:tcPr>
-                </a:tc>
-                <a:tc>
-                  <a:txBody>
-                    <a:bodyPr/>
-                    <a:lstStyle/>
-                    <a:p>
-                      <a:pPr algn="ctr"/>
-                      <a:r>
-                        <a:rPr sz="1050" b="1">
-                          <a:solidFill>
-                            <a:srgbClr val="F97316"/>
-                          </a:solidFill>
-                          <a:latin typeface="微软雅黑"/>
-                          <a:ea typeface="微软雅黑"/>
-                        </a:rPr>
-                        <a:t>🏅 强拟人陪伴(需适配)</a:t>
+                        <a:t>🥇 最佳平衡(官方+LoRA人设)</a:t>
                       </a:r>
                     </a:p>
                   </a:txBody>
@@ -14727,7 +14533,7 @@
                   </a:tcPr>
                 </a:tc>
               </a:tr>
-              <a:tr h="548640">
+              <a:tr h="530352">
                 <a:tc>
                   <a:txBody>
                     <a:bodyPr/>
@@ -14742,13 +14548,13 @@
                           <a:latin typeface="微软雅黑"/>
                           <a:ea typeface="微软雅黑"/>
                         </a:rPr>
-                        <a:t>Qwen2.5-3B</a:t>
+                        <a:t>Qwen3-4B</a:t>
                       </a:r>
                     </a:p>
                   </a:txBody>
                   <a:tcPr marL="45720" marR="45720" marT="9144" marB="9144" anchor="ctr">
                     <a:solidFill>
-                      <a:srgbClr val="16283E"/>
+                      <a:srgbClr val="1B3450"/>
                     </a:solidFill>
                   </a:tcPr>
                 </a:tc>
@@ -14767,6 +14573,176 @@
                           <a:ea typeface="微软雅黑"/>
                         </a:rPr>
                         <a:t>7.5</a:t>
+                      </a:r>
+                    </a:p>
+                  </a:txBody>
+                  <a:tcPr marL="45720" marR="45720" marT="9144" marB="9144" anchor="ctr">
+                    <a:solidFill>
+                      <a:srgbClr val="1B3450"/>
+                    </a:solidFill>
+                  </a:tcPr>
+                </a:tc>
+                <a:tc>
+                  <a:txBody>
+                    <a:bodyPr/>
+                    <a:lstStyle/>
+                    <a:p>
+                      <a:pPr algn="ctr"/>
+                      <a:r>
+                        <a:rPr sz="1050" b="0">
+                          <a:solidFill>
+                            <a:srgbClr val="C6D3E2"/>
+                          </a:solidFill>
+                          <a:latin typeface="微软雅黑"/>
+                          <a:ea typeface="微软雅黑"/>
+                        </a:rPr>
+                        <a:t>10.0</a:t>
+                      </a:r>
+                    </a:p>
+                  </a:txBody>
+                  <a:tcPr marL="45720" marR="45720" marT="9144" marB="9144" anchor="ctr">
+                    <a:solidFill>
+                      <a:srgbClr val="1B3450"/>
+                    </a:solidFill>
+                  </a:tcPr>
+                </a:tc>
+                <a:tc>
+                  <a:txBody>
+                    <a:bodyPr/>
+                    <a:lstStyle/>
+                    <a:p>
+                      <a:pPr algn="ctr"/>
+                      <a:r>
+                        <a:rPr sz="1050" b="0">
+                          <a:solidFill>
+                            <a:srgbClr val="C6D3E2"/>
+                          </a:solidFill>
+                          <a:latin typeface="微软雅黑"/>
+                          <a:ea typeface="微软雅黑"/>
+                        </a:rPr>
+                        <a:t>6.5</a:t>
+                      </a:r>
+                    </a:p>
+                  </a:txBody>
+                  <a:tcPr marL="45720" marR="45720" marT="9144" marB="9144" anchor="ctr">
+                    <a:solidFill>
+                      <a:srgbClr val="1B3450"/>
+                    </a:solidFill>
+                  </a:tcPr>
+                </a:tc>
+                <a:tc>
+                  <a:txBody>
+                    <a:bodyPr/>
+                    <a:lstStyle/>
+                    <a:p>
+                      <a:pPr algn="ctr"/>
+                      <a:r>
+                        <a:rPr sz="1050" b="0">
+                          <a:solidFill>
+                            <a:srgbClr val="C6D3E2"/>
+                          </a:solidFill>
+                          <a:latin typeface="微软雅黑"/>
+                          <a:ea typeface="微软雅黑"/>
+                        </a:rPr>
+                        <a:t>9.0</a:t>
+                      </a:r>
+                    </a:p>
+                  </a:txBody>
+                  <a:tcPr marL="45720" marR="45720" marT="9144" marB="9144" anchor="ctr">
+                    <a:solidFill>
+                      <a:srgbClr val="1B3450"/>
+                    </a:solidFill>
+                  </a:tcPr>
+                </a:tc>
+                <a:tc>
+                  <a:txBody>
+                    <a:bodyPr/>
+                    <a:lstStyle/>
+                    <a:p>
+                      <a:pPr algn="ctr"/>
+                      <a:r>
+                        <a:rPr sz="1050" b="0">
+                          <a:solidFill>
+                            <a:srgbClr val="C6D3E2"/>
+                          </a:solidFill>
+                          <a:latin typeface="微软雅黑"/>
+                          <a:ea typeface="微软雅黑"/>
+                        </a:rPr>
+                        <a:t>6.5</a:t>
+                      </a:r>
+                    </a:p>
+                  </a:txBody>
+                  <a:tcPr marL="45720" marR="45720" marT="9144" marB="9144" anchor="ctr">
+                    <a:solidFill>
+                      <a:srgbClr val="1B3450"/>
+                    </a:solidFill>
+                  </a:tcPr>
+                </a:tc>
+                <a:tc>
+                  <a:txBody>
+                    <a:bodyPr/>
+                    <a:lstStyle/>
+                    <a:p>
+                      <a:pPr algn="ctr"/>
+                      <a:r>
+                        <a:rPr sz="1050" b="0">
+                          <a:solidFill>
+                            <a:srgbClr val="C6D3E2"/>
+                          </a:solidFill>
+                          <a:latin typeface="微软雅黑"/>
+                          <a:ea typeface="微软雅黑"/>
+                        </a:rPr>
+                        <a:t>8.05</a:t>
+                      </a:r>
+                    </a:p>
+                  </a:txBody>
+                  <a:tcPr marL="45720" marR="45720" marT="9144" marB="9144" anchor="ctr">
+                    <a:solidFill>
+                      <a:srgbClr val="1B3450"/>
+                    </a:solidFill>
+                  </a:tcPr>
+                </a:tc>
+                <a:tc>
+                  <a:txBody>
+                    <a:bodyPr/>
+                    <a:lstStyle/>
+                    <a:p>
+                      <a:pPr algn="ctr"/>
+                      <a:r>
+                        <a:rPr sz="1050" b="0">
+                          <a:solidFill>
+                            <a:srgbClr val="C6D3E2"/>
+                          </a:solidFill>
+                          <a:latin typeface="微软雅黑"/>
+                          <a:ea typeface="微软雅黑"/>
+                        </a:rPr>
+                        <a:t>🥈 官方适配·拟人更强(偏重)</a:t>
+                      </a:r>
+                    </a:p>
+                  </a:txBody>
+                  <a:tcPr marL="45720" marR="45720" marT="9144" marB="9144" anchor="ctr">
+                    <a:solidFill>
+                      <a:srgbClr val="1B3450"/>
+                    </a:solidFill>
+                  </a:tcPr>
+                </a:tc>
+              </a:tr>
+              <a:tr h="530352">
+                <a:tc>
+                  <a:txBody>
+                    <a:bodyPr/>
+                    <a:lstStyle/>
+                    <a:p>
+                      <a:pPr algn="ctr"/>
+                      <a:r>
+                        <a:rPr sz="1050" b="0">
+                          <a:solidFill>
+                            <a:srgbClr val="C6D3E2"/>
+                          </a:solidFill>
+                          <a:latin typeface="微软雅黑"/>
+                          <a:ea typeface="微软雅黑"/>
+                        </a:rPr>
+                        <a:t>Qwen2.5-3B</a:t>
                       </a:r>
                     </a:p>
                   </a:txBody>
@@ -14886,7 +14862,7 @@
                           <a:latin typeface="微软雅黑"/>
                           <a:ea typeface="微软雅黑"/>
                         </a:rPr>
-                        <a:t>7.85</a:t>
+                        <a:t>7.5</a:t>
                       </a:r>
                     </a:p>
                   </a:txBody>
@@ -14910,7 +14886,7 @@
                           <a:latin typeface="微软雅黑"/>
                           <a:ea typeface="微软雅黑"/>
                         </a:rPr>
-                        <a:t>🥈 质量更稳</a:t>
+                        <a:t>8.00</a:t>
                       </a:r>
                     </a:p>
                   </a:txBody>
@@ -14920,8 +14896,6 @@
                     </a:solidFill>
                   </a:tcPr>
                 </a:tc>
-              </a:tr>
-              <a:tr h="548640">
                 <a:tc>
                   <a:txBody>
                     <a:bodyPr/>
@@ -14936,7 +14910,33 @@
                           <a:latin typeface="微软雅黑"/>
                           <a:ea typeface="微软雅黑"/>
                         </a:rPr>
-                        <a:t>Qwen3-4B</a:t>
+                        <a:t>🥉 易适配·拟人稳</a:t>
+                      </a:r>
+                    </a:p>
+                  </a:txBody>
+                  <a:tcPr marL="45720" marR="45720" marT="9144" marB="9144" anchor="ctr">
+                    <a:solidFill>
+                      <a:srgbClr val="16283E"/>
+                    </a:solidFill>
+                  </a:tcPr>
+                </a:tc>
+              </a:tr>
+              <a:tr h="530352">
+                <a:tc>
+                  <a:txBody>
+                    <a:bodyPr/>
+                    <a:lstStyle/>
+                    <a:p>
+                      <a:pPr algn="l"/>
+                      <a:r>
+                        <a:rPr sz="1050" b="0">
+                          <a:solidFill>
+                            <a:srgbClr val="C6D3E2"/>
+                          </a:solidFill>
+                          <a:latin typeface="微软雅黑"/>
+                          <a:ea typeface="微软雅黑"/>
+                        </a:rPr>
+                        <a:t>Qwen2.5-1.5B</a:t>
                       </a:r>
                     </a:p>
                   </a:txBody>
@@ -14984,55 +14984,7 @@
                           <a:latin typeface="微软雅黑"/>
                           <a:ea typeface="微软雅黑"/>
                         </a:rPr>
-                        <a:t>8.5</a:t>
-                      </a:r>
-                    </a:p>
-                  </a:txBody>
-                  <a:tcPr marL="45720" marR="45720" marT="9144" marB="9144" anchor="ctr">
-                    <a:solidFill>
-                      <a:srgbClr val="1B3450"/>
-                    </a:solidFill>
-                  </a:tcPr>
-                </a:tc>
-                <a:tc>
-                  <a:txBody>
-                    <a:bodyPr/>
-                    <a:lstStyle/>
-                    <a:p>
-                      <a:pPr algn="ctr"/>
-                      <a:r>
-                        <a:rPr sz="1050" b="0">
-                          <a:solidFill>
-                            <a:srgbClr val="C6D3E2"/>
-                          </a:solidFill>
-                          <a:latin typeface="微软雅黑"/>
-                          <a:ea typeface="微软雅黑"/>
-                        </a:rPr>
-                        <a:t>8.5</a:t>
-                      </a:r>
-                    </a:p>
-                  </a:txBody>
-                  <a:tcPr marL="45720" marR="45720" marT="9144" marB="9144" anchor="ctr">
-                    <a:solidFill>
-                      <a:srgbClr val="1B3450"/>
-                    </a:solidFill>
-                  </a:tcPr>
-                </a:tc>
-                <a:tc>
-                  <a:txBody>
-                    <a:bodyPr/>
-                    <a:lstStyle/>
-                    <a:p>
-                      <a:pPr algn="ctr"/>
-                      <a:r>
-                        <a:rPr sz="1050" b="0">
-                          <a:solidFill>
-                            <a:srgbClr val="C6D3E2"/>
-                          </a:solidFill>
-                          <a:latin typeface="微软雅黑"/>
-                          <a:ea typeface="微软雅黑"/>
-                        </a:rPr>
-                        <a:t>6.5</a:t>
+                        <a:t>8.0</a:t>
                       </a:r>
                     </a:p>
                   </a:txBody>
@@ -15080,7 +15032,7 @@
                           <a:latin typeface="微软雅黑"/>
                           <a:ea typeface="微软雅黑"/>
                         </a:rPr>
-                        <a:t>7.63</a:t>
+                        <a:t>9.0</a:t>
                       </a:r>
                     </a:p>
                   </a:txBody>
@@ -15104,39 +15056,13 @@
                           <a:latin typeface="微软雅黑"/>
                           <a:ea typeface="微软雅黑"/>
                         </a:rPr>
-                        <a:t>提质·建议配云/S100P</a:t>
+                        <a:t>9.0</a:t>
                       </a:r>
                     </a:p>
                   </a:txBody>
                   <a:tcPr marL="45720" marR="45720" marT="9144" marB="9144" anchor="ctr">
                     <a:solidFill>
                       <a:srgbClr val="1B3450"/>
-                    </a:solidFill>
-                  </a:tcPr>
-                </a:tc>
-              </a:tr>
-              <a:tr h="548640">
-                <a:tc>
-                  <a:txBody>
-                    <a:bodyPr/>
-                    <a:lstStyle/>
-                    <a:p>
-                      <a:pPr algn="ctr"/>
-                      <a:r>
-                        <a:rPr sz="1050" b="0">
-                          <a:solidFill>
-                            <a:srgbClr val="C6D3E2"/>
-                          </a:solidFill>
-                          <a:latin typeface="微软雅黑"/>
-                          <a:ea typeface="微软雅黑"/>
-                        </a:rPr>
-                        <a:t>Qwen3-0.6B</a:t>
-                      </a:r>
-                    </a:p>
-                  </a:txBody>
-                  <a:tcPr marL="45720" marR="45720" marT="9144" marB="9144" anchor="ctr">
-                    <a:solidFill>
-                      <a:srgbClr val="16283E"/>
                     </a:solidFill>
                   </a:tcPr>
                 </a:tc>
@@ -15154,7 +15080,57 @@
                           <a:latin typeface="微软雅黑"/>
                           <a:ea typeface="微软雅黑"/>
                         </a:rPr>
-                        <a:t>10.0</a:t>
+                        <a:t>8.00</a:t>
+                      </a:r>
+                    </a:p>
+                  </a:txBody>
+                  <a:tcPr marL="45720" marR="45720" marT="9144" marB="9144" anchor="ctr">
+                    <a:solidFill>
+                      <a:srgbClr val="1B3450"/>
+                    </a:solidFill>
+                  </a:tcPr>
+                </a:tc>
+                <a:tc>
+                  <a:txBody>
+                    <a:bodyPr/>
+                    <a:lstStyle/>
+                    <a:p>
+                      <a:pPr algn="ctr"/>
+                      <a:r>
+                        <a:rPr sz="1050" b="0">
+                          <a:solidFill>
+                            <a:srgbClr val="C6D3E2"/>
+                          </a:solidFill>
+                          <a:latin typeface="微软雅黑"/>
+                          <a:ea typeface="微软雅黑"/>
+                        </a:rPr>
+                        <a:t>低功耗并列·偏快</a:t>
+                      </a:r>
+                    </a:p>
+                  </a:txBody>
+                  <a:tcPr marL="45720" marR="45720" marT="9144" marB="9144" anchor="ctr">
+                    <a:solidFill>
+                      <a:srgbClr val="1B3450"/>
+                    </a:solidFill>
+                  </a:tcPr>
+                </a:tc>
+              </a:tr>
+              <a:tr h="530352">
+                <a:tc>
+                  <a:txBody>
+                    <a:bodyPr/>
+                    <a:lstStyle/>
+                    <a:p>
+                      <a:pPr algn="ctr"/>
+                      <a:r>
+                        <a:rPr sz="1050" b="0">
+                          <a:solidFill>
+                            <a:srgbClr val="C6D3E2"/>
+                          </a:solidFill>
+                          <a:latin typeface="微软雅黑"/>
+                          <a:ea typeface="微软雅黑"/>
+                        </a:rPr>
+                        <a:t>Qwen3-0.6B</a:t>
                       </a:r>
                     </a:p>
                   </a:txBody>
@@ -15202,7 +15178,7 @@
                           <a:latin typeface="微软雅黑"/>
                           <a:ea typeface="微软雅黑"/>
                         </a:rPr>
-                        <a:t>5.0</a:t>
+                        <a:t>10.0</a:t>
                       </a:r>
                     </a:p>
                   </a:txBody>
@@ -15274,7 +15250,31 @@
                           <a:latin typeface="微软雅黑"/>
                           <a:ea typeface="微软雅黑"/>
                         </a:rPr>
-                        <a:t>7.10</a:t>
+                        <a:t>10.0</a:t>
+                      </a:r>
+                    </a:p>
+                  </a:txBody>
+                  <a:tcPr marL="45720" marR="45720" marT="9144" marB="9144" anchor="ctr">
+                    <a:solidFill>
+                      <a:srgbClr val="16283E"/>
+                    </a:solidFill>
+                  </a:tcPr>
+                </a:tc>
+                <a:tc>
+                  <a:txBody>
+                    <a:bodyPr/>
+                    <a:lstStyle/>
+                    <a:p>
+                      <a:pPr algn="ctr"/>
+                      <a:r>
+                        <a:rPr sz="1050" b="0">
+                          <a:solidFill>
+                            <a:srgbClr val="C6D3E2"/>
+                          </a:solidFill>
+                          <a:latin typeface="微软雅黑"/>
+                          <a:ea typeface="微软雅黑"/>
+                        </a:rPr>
+                        <a:t>7.90</a:t>
                       </a:r>
                     </a:p>
                   </a:txBody>
@@ -15309,7 +15309,225 @@
                   </a:tcPr>
                 </a:tc>
               </a:tr>
-              <a:tr h="548640">
+              <a:tr h="530352">
+                <a:tc>
+                  <a:txBody>
+                    <a:bodyPr/>
+                    <a:lstStyle/>
+                    <a:p>
+                      <a:pPr algn="ctr"/>
+                      <a:r>
+                        <a:rPr sz="1050" b="1">
+                          <a:solidFill>
+                            <a:srgbClr val="F97316"/>
+                          </a:solidFill>
+                          <a:latin typeface="微软雅黑"/>
+                          <a:ea typeface="微软雅黑"/>
+                        </a:rPr>
+                        <a:t>Index-1.9B</a:t>
+                      </a:r>
+                    </a:p>
+                  </a:txBody>
+                  <a:tcPr marL="45720" marR="45720" marT="9144" marB="9144" anchor="ctr">
+                    <a:solidFill>
+                      <a:srgbClr val="173A57"/>
+                    </a:solidFill>
+                  </a:tcPr>
+                </a:tc>
+                <a:tc>
+                  <a:txBody>
+                    <a:bodyPr/>
+                    <a:lstStyle/>
+                    <a:p>
+                      <a:pPr algn="ctr"/>
+                      <a:r>
+                        <a:rPr sz="1050" b="1">
+                          <a:solidFill>
+                            <a:srgbClr val="F97316"/>
+                          </a:solidFill>
+                          <a:latin typeface="微软雅黑"/>
+                          <a:ea typeface="微软雅黑"/>
+                        </a:rPr>
+                        <a:t>9.5</a:t>
+                      </a:r>
+                    </a:p>
+                  </a:txBody>
+                  <a:tcPr marL="45720" marR="45720" marT="9144" marB="9144" anchor="ctr">
+                    <a:solidFill>
+                      <a:srgbClr val="173A57"/>
+                    </a:solidFill>
+                  </a:tcPr>
+                </a:tc>
+                <a:tc>
+                  <a:txBody>
+                    <a:bodyPr/>
+                    <a:lstStyle/>
+                    <a:p>
+                      <a:pPr algn="ctr"/>
+                      <a:r>
+                        <a:rPr sz="1050" b="1">
+                          <a:solidFill>
+                            <a:srgbClr val="F97316"/>
+                          </a:solidFill>
+                          <a:latin typeface="微软雅黑"/>
+                          <a:ea typeface="微软雅黑"/>
+                        </a:rPr>
+                        <a:t>5.0</a:t>
+                      </a:r>
+                    </a:p>
+                  </a:txBody>
+                  <a:tcPr marL="45720" marR="45720" marT="9144" marB="9144" anchor="ctr">
+                    <a:solidFill>
+                      <a:srgbClr val="173A57"/>
+                    </a:solidFill>
+                  </a:tcPr>
+                </a:tc>
+                <a:tc>
+                  <a:txBody>
+                    <a:bodyPr/>
+                    <a:lstStyle/>
+                    <a:p>
+                      <a:pPr algn="ctr"/>
+                      <a:r>
+                        <a:rPr sz="1050" b="1">
+                          <a:solidFill>
+                            <a:srgbClr val="F97316"/>
+                          </a:solidFill>
+                          <a:latin typeface="微软雅黑"/>
+                          <a:ea typeface="微软雅黑"/>
+                        </a:rPr>
+                        <a:t>8.0</a:t>
+                      </a:r>
+                    </a:p>
+                  </a:txBody>
+                  <a:tcPr marL="45720" marR="45720" marT="9144" marB="9144" anchor="ctr">
+                    <a:solidFill>
+                      <a:srgbClr val="173A57"/>
+                    </a:solidFill>
+                  </a:tcPr>
+                </a:tc>
+                <a:tc>
+                  <a:txBody>
+                    <a:bodyPr/>
+                    <a:lstStyle/>
+                    <a:p>
+                      <a:pPr algn="ctr"/>
+                      <a:r>
+                        <a:rPr sz="1050" b="1">
+                          <a:solidFill>
+                            <a:srgbClr val="F97316"/>
+                          </a:solidFill>
+                          <a:latin typeface="微软雅黑"/>
+                          <a:ea typeface="微软雅黑"/>
+                        </a:rPr>
+                        <a:t>8.0</a:t>
+                      </a:r>
+                    </a:p>
+                  </a:txBody>
+                  <a:tcPr marL="45720" marR="45720" marT="9144" marB="9144" anchor="ctr">
+                    <a:solidFill>
+                      <a:srgbClr val="173A57"/>
+                    </a:solidFill>
+                  </a:tcPr>
+                </a:tc>
+                <a:tc>
+                  <a:txBody>
+                    <a:bodyPr/>
+                    <a:lstStyle/>
+                    <a:p>
+                      <a:pPr algn="ctr"/>
+                      <a:r>
+                        <a:rPr sz="1050" b="1">
+                          <a:solidFill>
+                            <a:srgbClr val="F97316"/>
+                          </a:solidFill>
+                          <a:latin typeface="微软雅黑"/>
+                          <a:ea typeface="微软雅黑"/>
+                        </a:rPr>
+                        <a:t>8.5</a:t>
+                      </a:r>
+                    </a:p>
+                  </a:txBody>
+                  <a:tcPr marL="45720" marR="45720" marT="9144" marB="9144" anchor="ctr">
+                    <a:solidFill>
+                      <a:srgbClr val="173A57"/>
+                    </a:solidFill>
+                  </a:tcPr>
+                </a:tc>
+                <a:tc>
+                  <a:txBody>
+                    <a:bodyPr/>
+                    <a:lstStyle/>
+                    <a:p>
+                      <a:pPr algn="ctr"/>
+                      <a:r>
+                        <a:rPr sz="1050" b="1">
+                          <a:solidFill>
+                            <a:srgbClr val="F97316"/>
+                          </a:solidFill>
+                          <a:latin typeface="微软雅黑"/>
+                          <a:ea typeface="微软雅黑"/>
+                        </a:rPr>
+                        <a:t>7.75</a:t>
+                      </a:r>
+                    </a:p>
+                  </a:txBody>
+                  <a:tcPr marL="45720" marR="45720" marT="9144" marB="9144" anchor="ctr">
+                    <a:solidFill>
+                      <a:srgbClr val="173A57"/>
+                    </a:solidFill>
+                  </a:tcPr>
+                </a:tc>
+                <a:tc>
+                  <a:txBody>
+                    <a:bodyPr/>
+                    <a:lstStyle/>
+                    <a:p>
+                      <a:pPr algn="ctr"/>
+                      <a:r>
+                        <a:rPr sz="1050" b="1">
+                          <a:solidFill>
+                            <a:srgbClr val="F97316"/>
+                          </a:solidFill>
+                          <a:latin typeface="微软雅黑"/>
+                          <a:ea typeface="微软雅黑"/>
+                        </a:rPr>
+                        <a:t>🏅 拟人最强·但适配成本拉低</a:t>
+                      </a:r>
+                    </a:p>
+                  </a:txBody>
+                  <a:tcPr marL="45720" marR="45720" marT="9144" marB="9144" anchor="ctr">
+                    <a:solidFill>
+                      <a:srgbClr val="173A57"/>
+                    </a:solidFill>
+                  </a:tcPr>
+                </a:tc>
+              </a:tr>
+              <a:tr h="530352">
+                <a:tc>
+                  <a:txBody>
+                    <a:bodyPr/>
+                    <a:lstStyle/>
+                    <a:p>
+                      <a:pPr algn="l"/>
+                      <a:r>
+                        <a:rPr sz="1050" b="0">
+                          <a:solidFill>
+                            <a:srgbClr val="C6D3E2"/>
+                          </a:solidFill>
+                          <a:latin typeface="微软雅黑"/>
+                          <a:ea typeface="微软雅黑"/>
+                        </a:rPr>
+                        <a:t>MiniCPM3-4B</a:t>
+                      </a:r>
+                    </a:p>
+                  </a:txBody>
+                  <a:tcPr marL="45720" marR="45720" marT="9144" marB="9144" anchor="ctr">
+                    <a:solidFill>
+                      <a:srgbClr val="16283E"/>
+                    </a:solidFill>
+                  </a:tcPr>
+                </a:tc>
                 <a:tc>
                   <a:txBody>
                     <a:bodyPr/>
@@ -15324,13 +15542,13 @@
                           <a:latin typeface="微软雅黑"/>
                           <a:ea typeface="微软雅黑"/>
                         </a:rPr>
-                        <a:t>Qwen2.5-7B</a:t>
+                        <a:t>8.0</a:t>
                       </a:r>
                     </a:p>
                   </a:txBody>
                   <a:tcPr marL="45720" marR="45720" marT="9144" marB="9144" anchor="ctr">
                     <a:solidFill>
-                      <a:srgbClr val="1B3450"/>
+                      <a:srgbClr val="16283E"/>
                     </a:solidFill>
                   </a:tcPr>
                 </a:tc>
@@ -15354,7 +15572,7 @@
                   </a:txBody>
                   <a:tcPr marL="45720" marR="45720" marT="9144" marB="9144" anchor="ctr">
                     <a:solidFill>
-                      <a:srgbClr val="1B3450"/>
+                      <a:srgbClr val="16283E"/>
                     </a:solidFill>
                   </a:tcPr>
                 </a:tc>
@@ -15372,13 +15590,13 @@
                           <a:latin typeface="微软雅黑"/>
                           <a:ea typeface="微软雅黑"/>
                         </a:rPr>
-                        <a:t>8.5</a:t>
+                        <a:t>6.5</a:t>
                       </a:r>
                     </a:p>
                   </a:txBody>
                   <a:tcPr marL="45720" marR="45720" marT="9144" marB="9144" anchor="ctr">
                     <a:solidFill>
-                      <a:srgbClr val="1B3450"/>
+                      <a:srgbClr val="16283E"/>
                     </a:solidFill>
                   </a:tcPr>
                 </a:tc>
@@ -15402,7 +15620,7 @@
                   </a:txBody>
                   <a:tcPr marL="45720" marR="45720" marT="9144" marB="9144" anchor="ctr">
                     <a:solidFill>
-                      <a:srgbClr val="1B3450"/>
+                      <a:srgbClr val="16283E"/>
                     </a:solidFill>
                   </a:tcPr>
                 </a:tc>
@@ -15420,13 +15638,13 @@
                           <a:latin typeface="微软雅黑"/>
                           <a:ea typeface="微软雅黑"/>
                         </a:rPr>
-                        <a:t>5.0</a:t>
+                        <a:t>6.5</a:t>
                       </a:r>
                     </a:p>
                   </a:txBody>
                   <a:tcPr marL="45720" marR="45720" marT="9144" marB="9144" anchor="ctr">
                     <a:solidFill>
-                      <a:srgbClr val="1B3450"/>
+                      <a:srgbClr val="16283E"/>
                     </a:solidFill>
                   </a:tcPr>
                 </a:tc>
@@ -15444,13 +15662,13 @@
                           <a:latin typeface="微软雅黑"/>
                           <a:ea typeface="微软雅黑"/>
                         </a:rPr>
-                        <a:t>9.0</a:t>
+                        <a:t>6.95</a:t>
                       </a:r>
                     </a:p>
                   </a:txBody>
                   <a:tcPr marL="45720" marR="45720" marT="9144" marB="9144" anchor="ctr">
                     <a:solidFill>
-                      <a:srgbClr val="1B3450"/>
+                      <a:srgbClr val="16283E"/>
                     </a:solidFill>
                   </a:tcPr>
                 </a:tc>
@@ -15468,37 +15686,13 @@
                           <a:latin typeface="微软雅黑"/>
                           <a:ea typeface="微软雅黑"/>
                         </a:rPr>
-                        <a:t>7.10</a:t>
+                        <a:t>拟人不错·需自适配</a:t>
                       </a:r>
                     </a:p>
                   </a:txBody>
                   <a:tcPr marL="45720" marR="45720" marT="9144" marB="9144" anchor="ctr">
                     <a:solidFill>
-                      <a:srgbClr val="1B3450"/>
-                    </a:solidFill>
-                  </a:tcPr>
-                </a:tc>
-                <a:tc>
-                  <a:txBody>
-                    <a:bodyPr/>
-                    <a:lstStyle/>
-                    <a:p>
-                      <a:pPr algn="ctr"/>
-                      <a:r>
-                        <a:rPr sz="1050" b="0">
-                          <a:solidFill>
-                            <a:srgbClr val="C6D3E2"/>
-                          </a:solidFill>
-                          <a:latin typeface="微软雅黑"/>
-                          <a:ea typeface="微软雅黑"/>
-                        </a:rPr>
-                        <a:t>质量顶·S100吃力</a:t>
-                      </a:r>
-                    </a:p>
-                  </a:txBody>
-                  <a:tcPr marL="45720" marR="45720" marT="9144" marB="9144" anchor="ctr">
-                    <a:solidFill>
-                      <a:srgbClr val="1B3450"/>
+                      <a:srgbClr val="16283E"/>
                     </a:solidFill>
                   </a:tcPr>
                 </a:tc>
@@ -15515,8 +15709,8 @@
         </p:nvSpPr>
         <p:spPr>
           <a:xfrm>
-            <a:off x="548640" y="5943600"/>
-            <a:ext cx="11064240" cy="457200"/>
+            <a:off x="548640" y="5897880"/>
+            <a:ext cx="11064240" cy="502920"/>
           </a:xfrm>
           <a:prstGeom prst="rect">
             <a:avLst/>
@@ -15538,14 +15732,14 @@
               </a:spcAft>
             </a:pPr>
             <a:r>
-              <a:rPr sz="1100" b="0">
+              <a:rPr sz="1050" b="0">
                 <a:solidFill>
                   <a:srgbClr val="8A9DB2"/>
                 </a:solidFill>
                 <a:latin typeface="微软雅黑"/>
                 <a:ea typeface="微软雅黑"/>
               </a:rPr>
-              <a:t>权重：速度30%&gt;拟人25%&gt;准确20%&gt;资源15%&gt;中文10%，可按电池/实时性预算调整；评分为相对估算，建议盲测回填。</a:t>
+              <a:t>权重：拟人30% &gt; 适配25% &gt; 速度20% &gt; 中文15% &gt; 资源10%。关键：适配性把官方 Qwen 顶到前列；Index 拟人最强，却因「需自行适配」掉到第6——这就是为什么不直接选拟人最强的。</a:t>
             </a:r>
           </a:p>
         </p:txBody>
@@ -15787,7 +15981,7 @@
                 <a:latin typeface="微软雅黑"/>
                 <a:ea typeface="微软雅黑"/>
               </a:rPr>
-              <a:t>落地方案：端云协同（对标竞品）</a:t>
+              <a:t>落地方案：拟人优先 + 适配可落地</a:t>
             </a:r>
           </a:p>
         </p:txBody>
@@ -15852,8 +16046,8 @@
         </p:nvSpPr>
         <p:spPr>
           <a:xfrm>
-            <a:off x="548640" y="1600200"/>
-            <a:ext cx="11064240" cy="960120"/>
+            <a:off x="548640" y="1554480"/>
+            <a:ext cx="11064240" cy="932688"/>
           </a:xfrm>
           <a:prstGeom prst="roundRect">
             <a:avLst>
@@ -15908,8 +16102,8 @@
         </p:nvSpPr>
         <p:spPr>
           <a:xfrm>
-            <a:off x="548640" y="1600200"/>
-            <a:ext cx="118872" cy="960120"/>
+            <a:off x="548640" y="1554480"/>
+            <a:ext cx="118872" cy="932688"/>
           </a:xfrm>
           <a:prstGeom prst="roundRect">
             <a:avLst>
@@ -15962,8 +16156,8 @@
         </p:nvSpPr>
         <p:spPr>
           <a:xfrm>
-            <a:off x="868680" y="1645920"/>
-            <a:ext cx="2468880" cy="868680"/>
+            <a:off x="868680" y="1600200"/>
+            <a:ext cx="2468880" cy="841248"/>
           </a:xfrm>
           <a:prstGeom prst="rect">
             <a:avLst/>
@@ -16005,8 +16199,8 @@
         </p:nvSpPr>
         <p:spPr>
           <a:xfrm>
-            <a:off x="3383280" y="1645920"/>
-            <a:ext cx="2834640" cy="868680"/>
+            <a:off x="3291840" y="1600200"/>
+            <a:ext cx="3200400" cy="841248"/>
           </a:xfrm>
           <a:prstGeom prst="rect">
             <a:avLst/>
@@ -16028,14 +16222,14 @@
               </a:spcAft>
             </a:pPr>
             <a:r>
-              <a:rPr sz="1600" b="1">
+              <a:rPr sz="1500" b="1">
                 <a:solidFill>
                   <a:srgbClr val="F3F7FC"/>
                 </a:solidFill>
                 <a:latin typeface="微软雅黑"/>
                 <a:ea typeface="微软雅黑"/>
               </a:rPr>
-              <a:t>Qwen3-1.7B</a:t>
+              <a:t>Qwen3-1.7B + LoRA人设</a:t>
             </a:r>
           </a:p>
         </p:txBody>
@@ -16048,8 +16242,8 @@
         </p:nvSpPr>
         <p:spPr>
           <a:xfrm>
-            <a:off x="6309360" y="1645920"/>
-            <a:ext cx="5120640" cy="868680"/>
+            <a:off x="6583680" y="1600200"/>
+            <a:ext cx="4846320" cy="841248"/>
           </a:xfrm>
           <a:prstGeom prst="rect">
             <a:avLst/>
@@ -16071,14 +16265,14 @@
               </a:spcAft>
             </a:pPr>
             <a:r>
-              <a:rPr sz="1200" b="0">
+              <a:rPr sz="1150" b="0">
                 <a:solidFill>
                   <a:srgbClr val="C6D3E2"/>
                 </a:solidFill>
                 <a:latin typeface="微软雅黑"/>
                 <a:ea typeface="微软雅黑"/>
               </a:rPr>
-              <a:t>官方已适配，&lt;0.6s首响，快闲聊/意图/断网兜底</a:t>
+              <a:t>官方已适配可直接跑，用LoRA把人设/口吻/记忆拉满</a:t>
             </a:r>
           </a:p>
         </p:txBody>
@@ -16091,8 +16285,8 @@
         </p:nvSpPr>
         <p:spPr>
           <a:xfrm>
-            <a:off x="548640" y="2679192"/>
-            <a:ext cx="11064240" cy="960120"/>
+            <a:off x="548640" y="2596895"/>
+            <a:ext cx="11064240" cy="932688"/>
           </a:xfrm>
           <a:prstGeom prst="roundRect">
             <a:avLst>
@@ -16147,8 +16341,8 @@
         </p:nvSpPr>
         <p:spPr>
           <a:xfrm>
-            <a:off x="548640" y="2679192"/>
-            <a:ext cx="118872" cy="960120"/>
+            <a:off x="548640" y="2596895"/>
+            <a:ext cx="118872" cy="932688"/>
           </a:xfrm>
           <a:prstGeom prst="roundRect">
             <a:avLst>
@@ -16201,8 +16395,8 @@
         </p:nvSpPr>
         <p:spPr>
           <a:xfrm>
-            <a:off x="868680" y="2724912"/>
-            <a:ext cx="2468880" cy="868680"/>
+            <a:off x="868680" y="2642615"/>
+            <a:ext cx="2468880" cy="841248"/>
           </a:xfrm>
           <a:prstGeom prst="rect">
             <a:avLst/>
@@ -16244,8 +16438,8 @@
         </p:nvSpPr>
         <p:spPr>
           <a:xfrm>
-            <a:off x="3383280" y="2724912"/>
-            <a:ext cx="2834640" cy="868680"/>
+            <a:off x="3291840" y="2642615"/>
+            <a:ext cx="3200400" cy="841248"/>
           </a:xfrm>
           <a:prstGeom prst="rect">
             <a:avLst/>
@@ -16267,7 +16461,7 @@
               </a:spcAft>
             </a:pPr>
             <a:r>
-              <a:rPr sz="1600" b="1">
+              <a:rPr sz="1500" b="1">
                 <a:solidFill>
                   <a:srgbClr val="F3F7FC"/>
                 </a:solidFill>
@@ -16287,8 +16481,8 @@
         </p:nvSpPr>
         <p:spPr>
           <a:xfrm>
-            <a:off x="6309360" y="2724912"/>
-            <a:ext cx="5120640" cy="868680"/>
+            <a:off x="6583680" y="2642615"/>
+            <a:ext cx="4846320" cy="841248"/>
           </a:xfrm>
           <a:prstGeom prst="rect">
             <a:avLst/>
@@ -16310,14 +16504,14 @@
               </a:spcAft>
             </a:pPr>
             <a:r>
-              <a:rPr sz="1200" b="0">
+              <a:rPr sz="1150" b="0">
                 <a:solidFill>
                   <a:srgbClr val="C6D3E2"/>
                 </a:solidFill>
                 <a:latin typeface="微软雅黑"/>
                 <a:ea typeface="微软雅黑"/>
               </a:rPr>
-              <a:t>极快路由，与主模型分层，省电省算力</a:t>
+              <a:t>极快意图路由，与主模型分层，省电省算力</a:t>
             </a:r>
           </a:p>
         </p:txBody>
@@ -16330,8 +16524,8 @@
         </p:nvSpPr>
         <p:spPr>
           <a:xfrm>
-            <a:off x="548640" y="3758184"/>
-            <a:ext cx="11064240" cy="960120"/>
+            <a:off x="548640" y="3639310"/>
+            <a:ext cx="11064240" cy="932688"/>
           </a:xfrm>
           <a:prstGeom prst="roundRect">
             <a:avLst>
@@ -16386,8 +16580,8 @@
         </p:nvSpPr>
         <p:spPr>
           <a:xfrm>
-            <a:off x="548640" y="3758184"/>
-            <a:ext cx="118872" cy="960120"/>
+            <a:off x="548640" y="3639310"/>
+            <a:ext cx="118872" cy="932688"/>
           </a:xfrm>
           <a:prstGeom prst="roundRect">
             <a:avLst>
@@ -16440,8 +16634,8 @@
         </p:nvSpPr>
         <p:spPr>
           <a:xfrm>
-            <a:off x="868680" y="3803904"/>
-            <a:ext cx="2468880" cy="868680"/>
+            <a:off x="868680" y="3685030"/>
+            <a:ext cx="2468880" cy="841248"/>
           </a:xfrm>
           <a:prstGeom prst="rect">
             <a:avLst/>
@@ -16470,7 +16664,7 @@
                 <a:latin typeface="微软雅黑"/>
                 <a:ea typeface="微软雅黑"/>
               </a:rPr>
-              <a:t>云端·高质量</a:t>
+              <a:t>云端·情感深聊</a:t>
             </a:r>
           </a:p>
         </p:txBody>
@@ -16483,8 +16677,8 @@
         </p:nvSpPr>
         <p:spPr>
           <a:xfrm>
-            <a:off x="3383280" y="3803904"/>
-            <a:ext cx="2834640" cy="868680"/>
+            <a:off x="3291840" y="3685030"/>
+            <a:ext cx="3200400" cy="841248"/>
           </a:xfrm>
           <a:prstGeom prst="rect">
             <a:avLst/>
@@ -16506,14 +16700,14 @@
               </a:spcAft>
             </a:pPr>
             <a:r>
-              <a:rPr sz="1600" b="1">
+              <a:rPr sz="1500" b="1">
                 <a:solidFill>
                   <a:srgbClr val="F3F7FC"/>
                 </a:solidFill>
                 <a:latin typeface="微软雅黑"/>
                 <a:ea typeface="微软雅黑"/>
               </a:rPr>
-              <a:t>通义/豆包/自研大模型</a:t>
+              <a:t>MiniMax / 豆包</a:t>
             </a:r>
           </a:p>
         </p:txBody>
@@ -16526,8 +16720,8 @@
         </p:nvSpPr>
         <p:spPr>
           <a:xfrm>
-            <a:off x="6309360" y="3803904"/>
-            <a:ext cx="5120640" cy="868680"/>
+            <a:off x="6583680" y="3685030"/>
+            <a:ext cx="4846320" cy="841248"/>
           </a:xfrm>
           <a:prstGeom prst="rect">
             <a:avLst/>
@@ -16549,14 +16743,14 @@
               </a:spcAft>
             </a:pPr>
             <a:r>
-              <a:rPr sz="1200" b="0">
+              <a:rPr sz="1150" b="0">
                 <a:solidFill>
                   <a:srgbClr val="C6D3E2"/>
                 </a:solidFill>
                 <a:latin typeface="微软雅黑"/>
                 <a:ea typeface="微软雅黑"/>
               </a:rPr>
-              <a:t>复杂问答、深度共情、长程人设交给云端</a:t>
+              <a:t>深度共情、长程人设走云端(BubblePal同款情感模型)</a:t>
             </a:r>
           </a:p>
         </p:txBody>
@@ -16569,8 +16763,8 @@
         </p:nvSpPr>
         <p:spPr>
           <a:xfrm>
-            <a:off x="548640" y="4837176"/>
-            <a:ext cx="11064240" cy="960120"/>
+            <a:off x="548640" y="4681725"/>
+            <a:ext cx="11064240" cy="932688"/>
           </a:xfrm>
           <a:prstGeom prst="roundRect">
             <a:avLst>
@@ -16625,8 +16819,8 @@
         </p:nvSpPr>
         <p:spPr>
           <a:xfrm>
-            <a:off x="548640" y="4837176"/>
-            <a:ext cx="118872" cy="960120"/>
+            <a:off x="548640" y="4681725"/>
+            <a:ext cx="118872" cy="932688"/>
           </a:xfrm>
           <a:prstGeom prst="roundRect">
             <a:avLst>
@@ -16679,8 +16873,8 @@
         </p:nvSpPr>
         <p:spPr>
           <a:xfrm>
-            <a:off x="868680" y="4882896"/>
-            <a:ext cx="2468880" cy="868680"/>
+            <a:off x="868680" y="4727445"/>
+            <a:ext cx="2468880" cy="841248"/>
           </a:xfrm>
           <a:prstGeom prst="rect">
             <a:avLst/>
@@ -16709,7 +16903,7 @@
                 <a:latin typeface="微软雅黑"/>
                 <a:ea typeface="微软雅黑"/>
               </a:rPr>
-              <a:t>强拟人陪伴(可选)</a:t>
+              <a:t>拟人天花板(可选)</a:t>
             </a:r>
           </a:p>
         </p:txBody>
@@ -16722,8 +16916,8 @@
         </p:nvSpPr>
         <p:spPr>
           <a:xfrm>
-            <a:off x="3383280" y="4882896"/>
-            <a:ext cx="2834640" cy="868680"/>
+            <a:off x="3291840" y="4727445"/>
+            <a:ext cx="3200400" cy="841248"/>
           </a:xfrm>
           <a:prstGeom prst="rect">
             <a:avLst/>
@@ -16745,14 +16939,14 @@
               </a:spcAft>
             </a:pPr>
             <a:r>
-              <a:rPr sz="1600" b="1">
+              <a:rPr sz="1500" b="1">
                 <a:solidFill>
                   <a:srgbClr val="F3F7FC"/>
                 </a:solidFill>
                 <a:latin typeface="微软雅黑"/>
                 <a:ea typeface="微软雅黑"/>
               </a:rPr>
-              <a:t>Index-1.9B / LoRA微调</a:t>
+              <a:t>Index-1.9B</a:t>
             </a:r>
           </a:p>
         </p:txBody>
@@ -16765,8 +16959,8 @@
         </p:nvSpPr>
         <p:spPr>
           <a:xfrm>
-            <a:off x="6309360" y="4882896"/>
-            <a:ext cx="5120640" cy="868680"/>
+            <a:off x="6583680" y="4727445"/>
+            <a:ext cx="4846320" cy="841248"/>
           </a:xfrm>
           <a:prstGeom prst="rect">
             <a:avLst/>
@@ -16788,14 +16982,14 @@
               </a:spcAft>
             </a:pPr>
             <a:r>
-              <a:rPr sz="1200" b="0">
+              <a:rPr sz="1150" b="0">
                 <a:solidFill>
                   <a:srgbClr val="C6D3E2"/>
                 </a:solidFill>
                 <a:latin typeface="微软雅黑"/>
                 <a:ea typeface="微软雅黑"/>
               </a:rPr>
-              <a:t>角色一致性专精；小模型靠微调补拟人短板</a:t>
+              <a:t>角色一致性最强，但要投入工具链适配成本</a:t>
             </a:r>
           </a:p>
         </p:txBody>
@@ -16808,8 +17002,8 @@
         </p:nvSpPr>
         <p:spPr>
           <a:xfrm>
-            <a:off x="548640" y="6126480"/>
-            <a:ext cx="10972800" cy="365760"/>
+            <a:off x="548640" y="5897880"/>
+            <a:ext cx="11064240" cy="548640"/>
           </a:xfrm>
           <a:prstGeom prst="rect">
             <a:avLst/>
@@ -16838,7 +17032,7 @@
                 <a:latin typeface="微软雅黑"/>
                 <a:ea typeface="微软雅黑"/>
               </a:rPr>
-              <a:t>一句话：端侧 Qwen3-1.7B 兜住实时与离线，云端大模型兜住质量——这正是 BubblePal 等量产产品验证过的结构。</a:t>
+              <a:t>一句话：拟人优先 ≠ 选拟人最强的 Index——适配性是硬约束。最优解 = 官方适配的 Qwen3-1.7B + LoRA人设微调，云端配情感模型补深度。</a:t>
             </a:r>
           </a:p>
         </p:txBody>
